--- a/docs/Atlas-MINDBOT.pptx
+++ b/docs/Atlas-MINDBOT.pptx
@@ -4,6 +4,9 @@
   <p:sldMasterIdLst>
     <p:sldMasterId id="2147483648" r:id="rId1"/>
   </p:sldMasterIdLst>
+  <p:notesMasterIdLst>
+    <p:notesMasterId r:id="rId10"/>
+  </p:notesMasterIdLst>
   <p:sldIdLst>
     <p:sldId id="256" r:id="rId2"/>
     <p:sldId id="257" r:id="rId3"/>
@@ -14,9 +17,6 @@
     <p:sldId id="262" r:id="rId8"/>
     <p:sldId id="263" r:id="rId9"/>
   </p:sldIdLst>
-  <p:notesMasterIdLst>
-    <p:notesMasterId r:id="rId10"/>
-  </p:notesMasterIdLst>
   <p:sldSz cx="12192000" cy="6858000"/>
   <p:notesSz cx="6858000" cy="12192000"/>
   <p:defaultTextStyle>
@@ -111,6 +111,11 @@
       </a:defRPr>
     </a:lvl9pPr>
   </p:defaultTextStyle>
+  <p:extLst>
+    <p:ext uri="{EFAFB233-063F-42B5-8137-9DF3F51BA10A}">
+      <p15:sldGuideLst xmlns:p15="http://schemas.microsoft.com/office/powerpoint/2012/main"/>
+    </p:ext>
+  </p:extLst>
 </p:presentation>
 </file>
 
@@ -136,234 +141,10 @@
           <a:chExt cx="0" cy="0"/>
         </a:xfrm>
       </p:grpSpPr>
-      <p:sp>
-        <p:nvSpPr>
-          <p:cNvPr id="2" name="Header Placeholder 1"/>
-          <p:cNvSpPr>
-            <a:spLocks noGrp="1"/>
-          </p:cNvSpPr>
-          <p:nvPr>
-            <p:ph type="hdr" sz="quarter"/>
-          </p:nvPr>
-        </p:nvSpPr>
-        <p:spPr>
-          <a:xfrm>
-            <a:off x="0" y="0"/>
-            <a:ext cx="2971800" cy="458788"/>
-          </a:xfrm>
-          <a:prstGeom prst="rect">
-            <a:avLst/>
-          </a:prstGeom>
-        </p:spPr>
-        <p:txBody>
-          <a:bodyPr vert="horz" lIns="91440" tIns="45720" rIns="91440" bIns="45720" rtlCol="0"/>
-          <a:lstStyle>
-            <a:lvl1pPr algn="l">
-              <a:defRPr sz="1200"/>
-            </a:lvl1pPr>
-          </a:lstStyle>
-          <a:p>
-            <a:endParaRPr lang="en-US"/>
-          </a:p>
-        </p:txBody>
-      </p:sp>
-      <p:sp>
-        <p:nvSpPr>
-          <p:cNvPr id="3" name="Date Placeholder 2"/>
-          <p:cNvSpPr>
-            <a:spLocks noGrp="1"/>
-          </p:cNvSpPr>
-          <p:nvPr>
-            <p:ph type="dt" idx="1"/>
-          </p:nvPr>
-        </p:nvSpPr>
-        <p:spPr>
-          <a:xfrm>
-            <a:off x="3884613" y="0"/>
-            <a:ext cx="2971800" cy="458788"/>
-          </a:xfrm>
-          <a:prstGeom prst="rect">
-            <a:avLst/>
-          </a:prstGeom>
-        </p:spPr>
-        <p:txBody>
-          <a:bodyPr vert="horz" lIns="91440" tIns="45720" rIns="91440" bIns="45720" rtlCol="0"/>
-          <a:lstStyle>
-            <a:lvl1pPr algn="r">
-              <a:defRPr sz="1200"/>
-            </a:lvl1pPr>
-          </a:lstStyle>
-          <a:p>
-            <a:fld id="{5282F153-3F37-0F45-9E97-73ACFA13230C}" type="datetimeFigureOut">
-              <a:rPr lang="en-US"/>
-              <a:t>7/23/19</a:t>
-            </a:fld>
-            <a:endParaRPr lang="en-US"/>
-          </a:p>
-        </p:txBody>
-      </p:sp>
-      <p:sp>
-        <p:nvSpPr>
-          <p:cNvPr id="4" name="Slide Image Placeholder 3"/>
-          <p:cNvSpPr>
-            <a:spLocks noGrp="1" noRot="1" noChangeAspect="1"/>
-          </p:cNvSpPr>
-          <p:nvPr>
-            <p:ph type="sldImg" idx="2"/>
-          </p:nvPr>
-        </p:nvSpPr>
-        <p:spPr>
-          <a:xfrm>
-            <a:off x="685800" y="1143000"/>
-            <a:ext cx="5486400" cy="3086100"/>
-          </a:xfrm>
-          <a:prstGeom prst="rect">
-            <a:avLst/>
-          </a:prstGeom>
-          <a:noFill/>
-          <a:ln w="12700">
-            <a:solidFill>
-              <a:prstClr val="black"/>
-            </a:solidFill>
-          </a:ln>
-        </p:spPr>
-        <p:txBody>
-          <a:bodyPr vert="horz" lIns="91440" tIns="45720" rIns="91440" bIns="45720" rtlCol="0" anchor="ctr"/>
-          <a:lstStyle/>
-          <a:p>
-            <a:endParaRPr lang="en-US"/>
-          </a:p>
-        </p:txBody>
-      </p:sp>
-      <p:sp>
-        <p:nvSpPr>
-          <p:cNvPr id="5" name="Notes Placeholder 4"/>
-          <p:cNvSpPr>
-            <a:spLocks noGrp="1"/>
-          </p:cNvSpPr>
-          <p:nvPr>
-            <p:ph type="body" sz="quarter" idx="3"/>
-          </p:nvPr>
-        </p:nvSpPr>
-        <p:spPr>
-          <a:xfrm>
-            <a:off x="685800" y="4400550"/>
-            <a:ext cx="5486400" cy="3600450"/>
-          </a:xfrm>
-          <a:prstGeom prst="rect">
-            <a:avLst/>
-          </a:prstGeom>
-        </p:spPr>
-        <p:txBody>
-          <a:bodyPr vert="horz" lIns="91440" tIns="45720" rIns="91440" bIns="45720" rtlCol="0"/>
-          <a:lstStyle/>
-          <a:p>
-            <a:pPr lvl="0"/>
-            <a:r>
-              <a:rPr lang="en-US"/>
-              <a:t>Click to edit Master text styles</a:t>
-            </a:r>
-          </a:p>
-          <a:p>
-            <a:pPr lvl="1"/>
-            <a:r>
-              <a:rPr lang="en-US"/>
-              <a:t>Second level</a:t>
-            </a:r>
-          </a:p>
-          <a:p>
-            <a:pPr lvl="2"/>
-            <a:r>
-              <a:rPr lang="en-US"/>
-              <a:t>Third level</a:t>
-            </a:r>
-          </a:p>
-          <a:p>
-            <a:pPr lvl="3"/>
-            <a:r>
-              <a:rPr lang="en-US"/>
-              <a:t>Fourth level</a:t>
-            </a:r>
-          </a:p>
-          <a:p>
-            <a:pPr lvl="4"/>
-            <a:r>
-              <a:rPr lang="en-US"/>
-              <a:t>Fifth level</a:t>
-            </a:r>
-          </a:p>
-        </p:txBody>
-      </p:sp>
-      <p:sp>
-        <p:nvSpPr>
-          <p:cNvPr id="6" name="Footer Placeholder 5"/>
-          <p:cNvSpPr>
-            <a:spLocks noGrp="1"/>
-          </p:cNvSpPr>
-          <p:nvPr>
-            <p:ph type="ftr" sz="quarter" idx="4"/>
-          </p:nvPr>
-        </p:nvSpPr>
-        <p:spPr>
-          <a:xfrm>
-            <a:off x="0" y="8685213"/>
-            <a:ext cx="2971800" cy="458787"/>
-          </a:xfrm>
-          <a:prstGeom prst="rect">
-            <a:avLst/>
-          </a:prstGeom>
-        </p:spPr>
-        <p:txBody>
-          <a:bodyPr vert="horz" lIns="91440" tIns="45720" rIns="91440" bIns="45720" rtlCol="0" anchor="b"/>
-          <a:lstStyle>
-            <a:lvl1pPr algn="l">
-              <a:defRPr sz="1200"/>
-            </a:lvl1pPr>
-          </a:lstStyle>
-          <a:p>
-            <a:endParaRPr lang="en-US"/>
-          </a:p>
-        </p:txBody>
-      </p:sp>
-      <p:sp>
-        <p:nvSpPr>
-          <p:cNvPr id="7" name="Slide Number Placeholder 6"/>
-          <p:cNvSpPr>
-            <a:spLocks noGrp="1"/>
-          </p:cNvSpPr>
-          <p:nvPr>
-            <p:ph type="sldNum" sz="quarter" idx="5"/>
-          </p:nvPr>
-        </p:nvSpPr>
-        <p:spPr>
-          <a:xfrm>
-            <a:off x="3884613" y="8685213"/>
-            <a:ext cx="2971800" cy="458787"/>
-          </a:xfrm>
-          <a:prstGeom prst="rect">
-            <a:avLst/>
-          </a:prstGeom>
-        </p:spPr>
-        <p:txBody>
-          <a:bodyPr vert="horz" lIns="91440" tIns="45720" rIns="91440" bIns="45720" rtlCol="0" anchor="b"/>
-          <a:lstStyle>
-            <a:lvl1pPr algn="r">
-              <a:defRPr sz="1200"/>
-            </a:lvl1pPr>
-          </a:lstStyle>
-          <a:p>
-            <a:fld id="{CE5E9CC1-C706-0F49-92D6-E571CC5EEA8F}" type="slidenum">
-              <a:rPr lang="en-US"/>
-              <a:t>‹#›</a:t>
-            </a:fld>
-            <a:endParaRPr lang="en-US"/>
-          </a:p>
-        </p:txBody>
-      </p:sp>
     </p:spTree>
     <p:extLst>
       <p:ext uri="{BB962C8B-B14F-4D97-AF65-F5344CB8AC3E}">
-        <p14:creationId xmlns:p14="http://schemas.microsoft.com/office/powerpoint/2010/main" val="1024086991"/>
+        <p14:creationId xmlns:p14="http://schemas.microsoft.com/office/powerpoint/2010/main" val="4013035061"/>
       </p:ext>
     </p:extLst>
   </p:cSld>
@@ -511,7 +292,6 @@
               <a:rPr lang="en-US" dirty="0"/>
               <a:t>Open here. One line: students don't lack information, they lack a second mind that remembers what they're forgetting. Then go straight to the demo.</a:t>
             </a:r>
-            <a:endParaRPr lang="en-US" dirty="0"/>
           </a:p>
         </p:txBody>
       </p:sp>
@@ -599,7 +379,6 @@
               <a:rPr lang="en-US" dirty="0"/>
               <a:t>Keep this to ten seconds. The demo makes the point better than the slide does.</a:t>
             </a:r>
-            <a:endParaRPr lang="en-US" dirty="0"/>
           </a:p>
         </p:txBody>
       </p:sp>
@@ -687,7 +466,6 @@
               <a:rPr lang="en-US" dirty="0"/>
               <a:t>This is the theme slide. Say the line at the bottom out loud — it is the whole pitch.</a:t>
             </a:r>
-            <a:endParaRPr lang="en-US" dirty="0"/>
           </a:p>
         </p:txBody>
       </p:sp>
@@ -775,7 +553,6 @@
               <a:rPr lang="en-US" dirty="0"/>
               <a:t>Don't read these out. Point at Adapt and Improve — they're the two nobody else builds.</a:t>
             </a:r>
-            <a:endParaRPr lang="en-US" dirty="0"/>
           </a:p>
         </p:txBody>
       </p:sp>
@@ -863,7 +640,6 @@
               <a:rPr lang="en-US" dirty="0"/>
               <a:t>This is the demo beat. Answer wrong on purpose, let it catch the misconception, then cut to the graph and show the same number has moved there too.</a:t>
             </a:r>
-            <a:endParaRPr lang="en-US" dirty="0"/>
           </a:p>
         </p:txBody>
       </p:sp>
@@ -951,7 +727,6 @@
               <a:rPr lang="en-US" dirty="0"/>
               <a:t>The rules ask you to explain the workflow. This slide is that answer — say the three steps in order.</a:t>
             </a:r>
-            <a:endParaRPr lang="en-US" dirty="0"/>
           </a:p>
         </p:txBody>
       </p:sp>
@@ -1039,7 +814,6 @@
               <a:rPr lang="en-US" dirty="0"/>
               <a:t>If a judge asks what you actually built versus what you glued together: the PDF reader and the offline coach are both ours, written because the off-the-shelf options failed.</a:t>
             </a:r>
-            <a:endParaRPr lang="en-US" dirty="0"/>
           </a:p>
         </p:txBody>
       </p:sp>
@@ -1127,7 +901,6 @@
               <a:rPr lang="en-US" dirty="0"/>
               <a:t>Close on the second line, then stop talking and let them ask.</a:t>
             </a:r>
-            <a:endParaRPr lang="en-US" dirty="0"/>
           </a:p>
         </p:txBody>
       </p:sp>
@@ -1200,6 +973,11 @@
 <file path=ppt/slideMasters/slideMaster1.xml><?xml version="1.0" encoding="utf-8"?>
 <p:sldMaster xmlns:a="http://schemas.openxmlformats.org/drawingml/2006/main" xmlns:r="http://schemas.openxmlformats.org/officeDocument/2006/relationships" xmlns:p="http://schemas.openxmlformats.org/presentationml/2006/main">
   <p:cSld>
+    <p:bg>
+      <p:bgRef idx="1001">
+        <a:schemeClr val="bg1"/>
+      </p:bgRef>
+    </p:bg>
     <p:spTree>
       <p:nvGrpSpPr>
         <p:cNvPr id="1" name=""/>
@@ -1482,6 +1260,7 @@
         <a:solidFill>
           <a:srgbClr val="1F2421"/>
         </a:solidFill>
+        <a:effectLst/>
       </p:bgPr>
     </p:bg>
     <p:spTree>
@@ -1617,11 +1396,11 @@
           <a:bodyPr wrap="square" lIns="0" tIns="0" rIns="0" bIns="0" rtlCol="0" anchor="ctr"/>
           <a:lstStyle/>
           <a:p>
-            <a:pPr indent="0" marL="0">
-              <a:buNone/>
-            </a:pPr>
-            <a:r>
-              <a:rPr lang="en-US" sz="1000" spc="200" kern="0" dirty="0">
+            <a:pPr marL="0" indent="0">
+              <a:buNone/>
+            </a:pPr>
+            <a:r>
+              <a:rPr lang="en-US" sz="1000" kern="0" spc="200" dirty="0">
                 <a:solidFill>
                   <a:srgbClr val="2BCDB6"/>
                 </a:solidFill>
@@ -1656,7 +1435,7 @@
           <a:bodyPr wrap="square" lIns="0" tIns="0" rIns="0" bIns="0" rtlCol="0" anchor="ctr"/>
           <a:lstStyle/>
           <a:p>
-            <a:pPr indent="0" marL="0">
+            <a:pPr marL="0" indent="0">
               <a:buNone/>
             </a:pPr>
             <a:r>
@@ -1695,7 +1474,7 @@
           <a:bodyPr wrap="square" lIns="0" tIns="0" rIns="0" bIns="0" rtlCol="0" anchor="ctr"/>
           <a:lstStyle/>
           <a:p>
-            <a:pPr indent="0" marL="0">
+            <a:pPr marL="0" indent="0">
               <a:buNone/>
             </a:pPr>
             <a:r>
@@ -1734,7 +1513,7 @@
           <a:bodyPr wrap="square" lIns="0" tIns="0" rIns="0" bIns="0" rtlCol="0" anchor="ctr"/>
           <a:lstStyle/>
           <a:p>
-            <a:pPr indent="0" marL="0">
+            <a:pPr marL="0" indent="0">
               <a:lnSpc>
                 <a:spcPts val="2400"/>
               </a:lnSpc>
@@ -1749,7 +1528,7 @@
                 <a:ea typeface="Calibri" pitchFamily="34" charset="-122"/>
                 <a:cs typeface="Calibri" pitchFamily="34" charset="-120"/>
               </a:rPr>
-              <a:t>Your first mind learns, and forgets. Atlas keeps a running model of what you know — every topic, a confidence score, a decay curve — and decides what you study next.</a:t>
+              <a:t>Your first mind learns, and forgets. Atlas keeps a running model of what you know , every topic, a confidence score, a decay curve  and decides what you study next.</a:t>
             </a:r>
             <a:endParaRPr lang="en-US" sz="1600" dirty="0"/>
           </a:p>
@@ -1776,11 +1555,11 @@
           <a:bodyPr wrap="square" lIns="0" tIns="0" rIns="0" bIns="0" rtlCol="0" anchor="ctr"/>
           <a:lstStyle/>
           <a:p>
-            <a:pPr indent="0" marL="0">
-              <a:buNone/>
-            </a:pPr>
-            <a:r>
-              <a:rPr lang="en-US" sz="1000" spc="150" kern="0" dirty="0">
+            <a:pPr marL="0" indent="0">
+              <a:buNone/>
+            </a:pPr>
+            <a:r>
+              <a:rPr lang="en-US" sz="1000" kern="0" spc="150" dirty="0">
                 <a:solidFill>
                   <a:srgbClr val="78817B"/>
                 </a:solidFill>
@@ -1810,6 +1589,7 @@
         <a:solidFill>
           <a:srgbClr val="1F2421"/>
         </a:solidFill>
+        <a:effectLst/>
       </p:bgPr>
     </p:bg>
     <p:spTree>
@@ -1847,11 +1627,11 @@
           <a:bodyPr wrap="square" lIns="0" tIns="0" rIns="0" bIns="0" rtlCol="0" anchor="ctr"/>
           <a:lstStyle/>
           <a:p>
-            <a:pPr indent="0" marL="0">
-              <a:buNone/>
-            </a:pPr>
-            <a:r>
-              <a:rPr lang="en-US" sz="1000" spc="200" kern="0" dirty="0">
+            <a:pPr marL="0" indent="0">
+              <a:buNone/>
+            </a:pPr>
+            <a:r>
+              <a:rPr lang="en-US" sz="1000" kern="0" spc="200" dirty="0">
                 <a:solidFill>
                   <a:srgbClr val="78817B"/>
                 </a:solidFill>
@@ -1886,7 +1666,7 @@
           <a:bodyPr wrap="square" lIns="0" tIns="0" rIns="0" bIns="0" rtlCol="0" anchor="ctr"/>
           <a:lstStyle/>
           <a:p>
-            <a:pPr indent="0" marL="0">
+            <a:pPr marL="0" indent="0">
               <a:buNone/>
             </a:pPr>
             <a:r>
@@ -1925,7 +1705,7 @@
           <a:bodyPr wrap="square" lIns="0" tIns="0" rIns="0" bIns="0" rtlCol="0" anchor="ctr"/>
           <a:lstStyle/>
           <a:p>
-            <a:pPr indent="0" marL="0">
+            <a:pPr marL="0" indent="0">
               <a:buNone/>
             </a:pPr>
             <a:r>
@@ -1969,7 +1749,7 @@
             <a:prstDash val="solid"/>
           </a:ln>
           <a:effectLst>
-            <a:outerShdw sx="100000" sy="100000" kx="0" ky="0" algn="bl" rotWithShape="0" blurRad="177800" dist="50800" dir="2700000">
+            <a:outerShdw blurRad="177800" dist="50800" dir="2700000" algn="bl" rotWithShape="0">
               <a:srgbClr val="0F1310">
                 <a:alpha val="55000"/>
               </a:srgbClr>
@@ -1998,11 +1778,11 @@
           <a:bodyPr wrap="square" lIns="0" tIns="0" rIns="0" bIns="0" rtlCol="0" anchor="ctr"/>
           <a:lstStyle/>
           <a:p>
-            <a:pPr indent="0" marL="0">
-              <a:buNone/>
-            </a:pPr>
-            <a:r>
-              <a:rPr lang="en-US" sz="1500" b="1" dirty="0">
+            <a:pPr marL="0" indent="0">
+              <a:buNone/>
+            </a:pPr>
+            <a:r>
+              <a:rPr lang="en-US" sz="1500" b="1" u="sng" dirty="0">
                 <a:solidFill>
                   <a:srgbClr val="E7ECE8"/>
                 </a:solidFill>
@@ -2012,7 +1792,7 @@
               </a:rPr>
               <a:t>ChatGPT</a:t>
             </a:r>
-            <a:endParaRPr lang="en-US" sz="1500" dirty="0"/>
+            <a:endParaRPr lang="en-US" sz="1500" u="sng" dirty="0"/>
           </a:p>
         </p:txBody>
       </p:sp>
@@ -2037,7 +1817,7 @@
           <a:bodyPr wrap="square" lIns="0" tIns="0" rIns="0" bIns="0" rtlCol="0" anchor="ctr"/>
           <a:lstStyle/>
           <a:p>
-            <a:pPr indent="0" marL="0">
+            <a:pPr marL="0" indent="0">
               <a:buNone/>
             </a:pPr>
             <a:r>
@@ -2081,7 +1861,7 @@
             <a:prstDash val="solid"/>
           </a:ln>
           <a:effectLst>
-            <a:outerShdw sx="100000" sy="100000" kx="0" ky="0" algn="bl" rotWithShape="0" blurRad="177800" dist="50800" dir="2700000">
+            <a:outerShdw blurRad="177800" dist="50800" dir="2700000" algn="bl" rotWithShape="0">
               <a:srgbClr val="0F1310">
                 <a:alpha val="55000"/>
               </a:srgbClr>
@@ -2110,11 +1890,11 @@
           <a:bodyPr wrap="square" lIns="0" tIns="0" rIns="0" bIns="0" rtlCol="0" anchor="ctr"/>
           <a:lstStyle/>
           <a:p>
-            <a:pPr indent="0" marL="0">
-              <a:buNone/>
-            </a:pPr>
-            <a:r>
-              <a:rPr lang="en-US" sz="1500" b="1" dirty="0">
+            <a:pPr marL="0" indent="0">
+              <a:buNone/>
+            </a:pPr>
+            <a:r>
+              <a:rPr lang="en-US" sz="1500" b="1" u="sng" dirty="0">
                 <a:solidFill>
                   <a:srgbClr val="E7ECE8"/>
                 </a:solidFill>
@@ -2124,7 +1904,7 @@
               </a:rPr>
               <a:t>Calendar</a:t>
             </a:r>
-            <a:endParaRPr lang="en-US" sz="1500" dirty="0"/>
+            <a:endParaRPr lang="en-US" sz="1500" u="sng" dirty="0"/>
           </a:p>
         </p:txBody>
       </p:sp>
@@ -2149,7 +1929,7 @@
           <a:bodyPr wrap="square" lIns="0" tIns="0" rIns="0" bIns="0" rtlCol="0" anchor="ctr"/>
           <a:lstStyle/>
           <a:p>
-            <a:pPr indent="0" marL="0">
+            <a:pPr marL="0" indent="0">
               <a:buNone/>
             </a:pPr>
             <a:r>
@@ -2193,7 +1973,7 @@
             <a:prstDash val="solid"/>
           </a:ln>
           <a:effectLst>
-            <a:outerShdw sx="100000" sy="100000" kx="0" ky="0" algn="bl" rotWithShape="0" blurRad="177800" dist="50800" dir="2700000">
+            <a:outerShdw blurRad="177800" dist="50800" dir="2700000" algn="bl" rotWithShape="0">
               <a:srgbClr val="0F1310">
                 <a:alpha val="55000"/>
               </a:srgbClr>
@@ -2222,11 +2002,11 @@
           <a:bodyPr wrap="square" lIns="0" tIns="0" rIns="0" bIns="0" rtlCol="0" anchor="ctr"/>
           <a:lstStyle/>
           <a:p>
-            <a:pPr indent="0" marL="0">
-              <a:buNone/>
-            </a:pPr>
-            <a:r>
-              <a:rPr lang="en-US" sz="1500" b="1" dirty="0">
+            <a:pPr marL="0" indent="0">
+              <a:buNone/>
+            </a:pPr>
+            <a:r>
+              <a:rPr lang="en-US" sz="1500" b="1" u="sng" dirty="0">
                 <a:solidFill>
                   <a:srgbClr val="E7ECE8"/>
                 </a:solidFill>
@@ -2236,7 +2016,7 @@
               </a:rPr>
               <a:t>Notion</a:t>
             </a:r>
-            <a:endParaRPr lang="en-US" sz="1500" dirty="0"/>
+            <a:endParaRPr lang="en-US" sz="1500" u="sng" dirty="0"/>
           </a:p>
         </p:txBody>
       </p:sp>
@@ -2261,7 +2041,7 @@
           <a:bodyPr wrap="square" lIns="0" tIns="0" rIns="0" bIns="0" rtlCol="0" anchor="ctr"/>
           <a:lstStyle/>
           <a:p>
-            <a:pPr indent="0" marL="0">
+            <a:pPr marL="0" indent="0">
               <a:buNone/>
             </a:pPr>
             <a:r>
@@ -2305,7 +2085,7 @@
             <a:prstDash val="solid"/>
           </a:ln>
           <a:effectLst>
-            <a:outerShdw sx="100000" sy="100000" kx="0" ky="0" algn="bl" rotWithShape="0" blurRad="177800" dist="50800" dir="2700000">
+            <a:outerShdw blurRad="177800" dist="50800" dir="2700000" algn="bl" rotWithShape="0">
               <a:srgbClr val="0F1310">
                 <a:alpha val="55000"/>
               </a:srgbClr>
@@ -2334,11 +2114,11 @@
           <a:bodyPr wrap="square" lIns="0" tIns="0" rIns="0" bIns="0" rtlCol="0" anchor="ctr"/>
           <a:lstStyle/>
           <a:p>
-            <a:pPr indent="0" marL="0">
-              <a:buNone/>
-            </a:pPr>
-            <a:r>
-              <a:rPr lang="en-US" sz="1500" b="1" dirty="0">
+            <a:pPr marL="0" indent="0">
+              <a:buNone/>
+            </a:pPr>
+            <a:r>
+              <a:rPr lang="en-US" sz="1500" b="1" u="sng" dirty="0">
                 <a:solidFill>
                   <a:srgbClr val="E7ECE8"/>
                 </a:solidFill>
@@ -2348,7 +2128,7 @@
               </a:rPr>
               <a:t>Forest</a:t>
             </a:r>
-            <a:endParaRPr lang="en-US" sz="1500" dirty="0"/>
+            <a:endParaRPr lang="en-US" sz="1500" u="sng" dirty="0"/>
           </a:p>
         </p:txBody>
       </p:sp>
@@ -2373,7 +2153,7 @@
           <a:bodyPr wrap="square" lIns="0" tIns="0" rIns="0" bIns="0" rtlCol="0" anchor="ctr"/>
           <a:lstStyle/>
           <a:p>
-            <a:pPr indent="0" marL="0">
+            <a:pPr marL="0" indent="0">
               <a:buNone/>
             </a:pPr>
             <a:r>
@@ -2385,7 +2165,7 @@
                 <a:ea typeface="Calibri" pitchFamily="34" charset="-122"/>
                 <a:cs typeface="Calibri" pitchFamily="34" charset="-120"/>
               </a:rPr>
-              <a:t>Focus timing</a:t>
+              <a:t>Focus timing and Pomodoro</a:t>
             </a:r>
             <a:endParaRPr lang="en-US" sz="1200" dirty="0"/>
           </a:p>
@@ -2417,7 +2197,7 @@
             <a:prstDash val="solid"/>
           </a:ln>
           <a:effectLst>
-            <a:outerShdw sx="100000" sy="100000" kx="0" ky="0" algn="bl" rotWithShape="0" blurRad="177800" dist="50800" dir="2700000">
+            <a:outerShdw blurRad="177800" dist="50800" dir="2700000" algn="bl" rotWithShape="0">
               <a:srgbClr val="0F1310">
                 <a:alpha val="55000"/>
               </a:srgbClr>
@@ -2446,11 +2226,11 @@
           <a:bodyPr wrap="square" lIns="0" tIns="0" rIns="0" bIns="0" rtlCol="0" anchor="ctr"/>
           <a:lstStyle/>
           <a:p>
-            <a:pPr indent="0" marL="0">
-              <a:buNone/>
-            </a:pPr>
-            <a:r>
-              <a:rPr lang="en-US" sz="1500" b="1" dirty="0">
+            <a:pPr marL="0" indent="0">
+              <a:buNone/>
+            </a:pPr>
+            <a:r>
+              <a:rPr lang="en-US" sz="1500" b="1" u="sng" dirty="0">
                 <a:solidFill>
                   <a:srgbClr val="E7ECE8"/>
                 </a:solidFill>
@@ -2460,7 +2240,7 @@
               </a:rPr>
               <a:t>Anki</a:t>
             </a:r>
-            <a:endParaRPr lang="en-US" sz="1500" dirty="0"/>
+            <a:endParaRPr lang="en-US" sz="1500" u="sng" dirty="0"/>
           </a:p>
         </p:txBody>
       </p:sp>
@@ -2485,7 +2265,7 @@
           <a:bodyPr wrap="square" lIns="0" tIns="0" rIns="0" bIns="0" rtlCol="0" anchor="ctr"/>
           <a:lstStyle/>
           <a:p>
-            <a:pPr indent="0" marL="0">
+            <a:pPr marL="0" indent="0">
               <a:buNone/>
             </a:pPr>
             <a:r>
@@ -2511,7 +2291,7 @@
         </p:nvSpPr>
         <p:spPr>
           <a:xfrm>
-            <a:off x="640080" y="4251960"/>
+            <a:off x="1026942" y="4370832"/>
             <a:ext cx="1005840" cy="1005840"/>
           </a:xfrm>
           <a:prstGeom prst="rect">
@@ -2524,7 +2304,7 @@
           <a:bodyPr wrap="square" lIns="0" tIns="0" rIns="0" bIns="0" rtlCol="0" anchor="ctr"/>
           <a:lstStyle/>
           <a:p>
-            <a:pPr indent="0" marL="0">
+            <a:pPr marL="0" indent="0">
               <a:buNone/>
             </a:pPr>
             <a:r>
@@ -2563,7 +2343,7 @@
           <a:bodyPr wrap="square" lIns="0" tIns="0" rIns="0" bIns="0" rtlCol="0" anchor="ctr"/>
           <a:lstStyle/>
           <a:p>
-            <a:pPr indent="0" marL="0">
+            <a:pPr marL="0" indent="0">
               <a:lnSpc>
                 <a:spcPts val="2400"/>
               </a:lnSpc>
@@ -2578,7 +2358,7 @@
                 <a:ea typeface="Calibri" pitchFamily="34" charset="-122"/>
                 <a:cs typeface="Calibri" pitchFamily="34" charset="-120"/>
               </a:rPr>
-              <a:t>apps that each solve one piece, and none of which knows the student's whole academic year. The result is decision fatigue — more time spent deciding what to revise than revising.</a:t>
+              <a:t>apps that each solve one piece, and none of which knows the student's whole academic year. The result is decision fatigue, more time spent deciding what to revise than revising.</a:t>
             </a:r>
             <a:endParaRPr lang="en-US" sz="1600" dirty="0"/>
           </a:p>
@@ -2600,6 +2380,7 @@
         <a:solidFill>
           <a:srgbClr val="1F2421"/>
         </a:solidFill>
+        <a:effectLst/>
       </p:bgPr>
     </p:bg>
     <p:spTree>
@@ -2637,11 +2418,11 @@
           <a:bodyPr wrap="square" lIns="0" tIns="0" rIns="0" bIns="0" rtlCol="0" anchor="ctr"/>
           <a:lstStyle/>
           <a:p>
-            <a:pPr indent="0" marL="0">
-              <a:buNone/>
-            </a:pPr>
-            <a:r>
-              <a:rPr lang="en-US" sz="1000" spc="200" kern="0" dirty="0">
+            <a:pPr marL="0" indent="0">
+              <a:buNone/>
+            </a:pPr>
+            <a:r>
+              <a:rPr lang="en-US" sz="1000" kern="0" spc="200" dirty="0">
                 <a:solidFill>
                   <a:srgbClr val="2BCDB6"/>
                 </a:solidFill>
@@ -2676,7 +2457,7 @@
           <a:bodyPr wrap="square" lIns="0" tIns="0" rIns="0" bIns="0" rtlCol="0" anchor="ctr"/>
           <a:lstStyle/>
           <a:p>
-            <a:pPr indent="0" marL="0">
+            <a:pPr marL="0" indent="0">
               <a:buNone/>
             </a:pPr>
             <a:r>
@@ -2720,7 +2501,7 @@
             <a:prstDash val="solid"/>
           </a:ln>
           <a:effectLst>
-            <a:outerShdw sx="100000" sy="100000" kx="0" ky="0" algn="bl" rotWithShape="0" blurRad="177800" dist="50800" dir="2700000">
+            <a:outerShdw blurRad="177800" dist="50800" dir="2700000" algn="bl" rotWithShape="0">
               <a:srgbClr val="0F1310">
                 <a:alpha val="55000"/>
               </a:srgbClr>
@@ -2749,11 +2530,11 @@
           <a:bodyPr wrap="square" lIns="0" tIns="0" rIns="0" bIns="0" rtlCol="0" anchor="ctr"/>
           <a:lstStyle/>
           <a:p>
-            <a:pPr indent="0" marL="0">
-              <a:buNone/>
-            </a:pPr>
-            <a:r>
-              <a:rPr lang="en-US" sz="1000" spc="200" kern="0" dirty="0">
+            <a:pPr marL="0" indent="0">
+              <a:buNone/>
+            </a:pPr>
+            <a:r>
+              <a:rPr lang="en-US" sz="1000" kern="0" spc="200" dirty="0">
                 <a:solidFill>
                   <a:srgbClr val="78817B"/>
                 </a:solidFill>
@@ -2788,7 +2569,7 @@
           <a:bodyPr wrap="square" lIns="0" tIns="0" rIns="0" bIns="0" rtlCol="0" anchor="ctr"/>
           <a:lstStyle/>
           <a:p>
-            <a:pPr indent="0" marL="0">
+            <a:pPr marL="0" indent="0">
               <a:buNone/>
             </a:pPr>
             <a:r>
@@ -2938,7 +2719,7 @@
             <a:prstDash val="solid"/>
           </a:ln>
           <a:effectLst>
-            <a:outerShdw sx="100000" sy="100000" kx="0" ky="0" algn="bl" rotWithShape="0" blurRad="177800" dist="50800" dir="2700000">
+            <a:outerShdw blurRad="177800" dist="50800" dir="2700000" algn="bl" rotWithShape="0">
               <a:srgbClr val="0F1310">
                 <a:alpha val="55000"/>
               </a:srgbClr>
@@ -2967,11 +2748,11 @@
           <a:bodyPr wrap="square" lIns="0" tIns="0" rIns="0" bIns="0" rtlCol="0" anchor="ctr"/>
           <a:lstStyle/>
           <a:p>
-            <a:pPr indent="0" marL="0">
-              <a:buNone/>
-            </a:pPr>
-            <a:r>
-              <a:rPr lang="en-US" sz="1000" spc="200" kern="0" dirty="0">
+            <a:pPr marL="0" indent="0">
+              <a:buNone/>
+            </a:pPr>
+            <a:r>
+              <a:rPr lang="en-US" sz="1000" kern="0" spc="200" dirty="0">
                 <a:solidFill>
                   <a:srgbClr val="2BCDB6"/>
                 </a:solidFill>
@@ -3006,7 +2787,7 @@
           <a:bodyPr wrap="square" lIns="0" tIns="0" rIns="0" bIns="0" rtlCol="0" anchor="ctr"/>
           <a:lstStyle/>
           <a:p>
-            <a:pPr indent="0" marL="0">
+            <a:pPr marL="0" indent="0">
               <a:buNone/>
             </a:pPr>
             <a:r>
@@ -3151,7 +2932,7 @@
           <a:bodyPr wrap="square" lIns="0" tIns="0" rIns="0" bIns="0" rtlCol="0" anchor="ctr"/>
           <a:lstStyle/>
           <a:p>
-            <a:pPr algn="ctr" indent="0" marL="0">
+            <a:pPr marL="0" indent="0" algn="ctr">
               <a:buNone/>
             </a:pPr>
             <a:r>
@@ -3185,6 +2966,7 @@
         <a:solidFill>
           <a:srgbClr val="1F2421"/>
         </a:solidFill>
+        <a:effectLst/>
       </p:bgPr>
     </p:bg>
     <p:spTree>
@@ -3222,11 +3004,11 @@
           <a:bodyPr wrap="square" lIns="0" tIns="0" rIns="0" bIns="0" rtlCol="0" anchor="ctr"/>
           <a:lstStyle/>
           <a:p>
-            <a:pPr indent="0" marL="0">
-              <a:buNone/>
-            </a:pPr>
-            <a:r>
-              <a:rPr lang="en-US" sz="1000" spc="200" kern="0" dirty="0">
+            <a:pPr marL="0" indent="0">
+              <a:buNone/>
+            </a:pPr>
+            <a:r>
+              <a:rPr lang="en-US" sz="1000" kern="0" spc="200" dirty="0">
                 <a:solidFill>
                   <a:srgbClr val="78817B"/>
                 </a:solidFill>
@@ -3261,7 +3043,7 @@
           <a:bodyPr wrap="square" lIns="0" tIns="0" rIns="0" bIns="0" rtlCol="0" anchor="ctr"/>
           <a:lstStyle/>
           <a:p>
-            <a:pPr indent="0" marL="0">
+            <a:pPr marL="0" indent="0">
               <a:buNone/>
             </a:pPr>
             <a:r>
@@ -3305,7 +3087,7 @@
             <a:prstDash val="solid"/>
           </a:ln>
           <a:effectLst>
-            <a:outerShdw sx="100000" sy="100000" kx="0" ky="0" algn="bl" rotWithShape="0" blurRad="177800" dist="50800" dir="2700000">
+            <a:outerShdw blurRad="177800" dist="50800" dir="2700000" algn="bl" rotWithShape="0">
               <a:srgbClr val="0F1310">
                 <a:alpha val="55000"/>
               </a:srgbClr>
@@ -3359,7 +3141,7 @@
           <a:bodyPr wrap="square" lIns="0" tIns="0" rIns="0" bIns="0" rtlCol="0" anchor="ctr"/>
           <a:lstStyle/>
           <a:p>
-            <a:pPr indent="0" marL="0">
+            <a:pPr marL="0" indent="0">
               <a:buNone/>
             </a:pPr>
             <a:r>
@@ -3398,7 +3180,7 @@
           <a:bodyPr wrap="square" lIns="0" tIns="0" rIns="0" bIns="0" rtlCol="0" anchor="ctr"/>
           <a:lstStyle/>
           <a:p>
-            <a:pPr indent="0" marL="0">
+            <a:pPr marL="0" indent="0">
               <a:lnSpc>
                 <a:spcPts val="1900"/>
               </a:lnSpc>
@@ -3445,7 +3227,7 @@
             <a:prstDash val="solid"/>
           </a:ln>
           <a:effectLst>
-            <a:outerShdw sx="100000" sy="100000" kx="0" ky="0" algn="bl" rotWithShape="0" blurRad="177800" dist="50800" dir="2700000">
+            <a:outerShdw blurRad="177800" dist="50800" dir="2700000" algn="bl" rotWithShape="0">
               <a:srgbClr val="0F1310">
                 <a:alpha val="55000"/>
               </a:srgbClr>
@@ -3499,7 +3281,7 @@
           <a:bodyPr wrap="square" lIns="0" tIns="0" rIns="0" bIns="0" rtlCol="0" anchor="ctr"/>
           <a:lstStyle/>
           <a:p>
-            <a:pPr indent="0" marL="0">
+            <a:pPr marL="0" indent="0">
               <a:buNone/>
             </a:pPr>
             <a:r>
@@ -3538,7 +3320,7 @@
           <a:bodyPr wrap="square" lIns="0" tIns="0" rIns="0" bIns="0" rtlCol="0" anchor="ctr"/>
           <a:lstStyle/>
           <a:p>
-            <a:pPr indent="0" marL="0">
+            <a:pPr marL="0" indent="0">
               <a:lnSpc>
                 <a:spcPts val="1900"/>
               </a:lnSpc>
@@ -3585,7 +3367,7 @@
             <a:prstDash val="solid"/>
           </a:ln>
           <a:effectLst>
-            <a:outerShdw sx="100000" sy="100000" kx="0" ky="0" algn="bl" rotWithShape="0" blurRad="177800" dist="50800" dir="2700000">
+            <a:outerShdw blurRad="177800" dist="50800" dir="2700000" algn="bl" rotWithShape="0">
               <a:srgbClr val="0F1310">
                 <a:alpha val="55000"/>
               </a:srgbClr>
@@ -3639,7 +3421,7 @@
           <a:bodyPr wrap="square" lIns="0" tIns="0" rIns="0" bIns="0" rtlCol="0" anchor="ctr"/>
           <a:lstStyle/>
           <a:p>
-            <a:pPr indent="0" marL="0">
+            <a:pPr marL="0" indent="0">
               <a:buNone/>
             </a:pPr>
             <a:r>
@@ -3678,7 +3460,7 @@
           <a:bodyPr wrap="square" lIns="0" tIns="0" rIns="0" bIns="0" rtlCol="0" anchor="ctr"/>
           <a:lstStyle/>
           <a:p>
-            <a:pPr indent="0" marL="0">
+            <a:pPr marL="0" indent="0">
               <a:lnSpc>
                 <a:spcPts val="1900"/>
               </a:lnSpc>
@@ -3725,7 +3507,7 @@
             <a:prstDash val="solid"/>
           </a:ln>
           <a:effectLst>
-            <a:outerShdw sx="100000" sy="100000" kx="0" ky="0" algn="bl" rotWithShape="0" blurRad="177800" dist="50800" dir="2700000">
+            <a:outerShdw blurRad="177800" dist="50800" dir="2700000" algn="bl" rotWithShape="0">
               <a:srgbClr val="0F1310">
                 <a:alpha val="55000"/>
               </a:srgbClr>
@@ -3779,7 +3561,7 @@
           <a:bodyPr wrap="square" lIns="0" tIns="0" rIns="0" bIns="0" rtlCol="0" anchor="ctr"/>
           <a:lstStyle/>
           <a:p>
-            <a:pPr indent="0" marL="0">
+            <a:pPr marL="0" indent="0">
               <a:buNone/>
             </a:pPr>
             <a:r>
@@ -3818,7 +3600,7 @@
           <a:bodyPr wrap="square" lIns="0" tIns="0" rIns="0" bIns="0" rtlCol="0" anchor="ctr"/>
           <a:lstStyle/>
           <a:p>
-            <a:pPr indent="0" marL="0">
+            <a:pPr marL="0" indent="0">
               <a:lnSpc>
                 <a:spcPts val="1900"/>
               </a:lnSpc>
@@ -3865,7 +3647,7 @@
             <a:prstDash val="solid"/>
           </a:ln>
           <a:effectLst>
-            <a:outerShdw sx="100000" sy="100000" kx="0" ky="0" algn="bl" rotWithShape="0" blurRad="177800" dist="50800" dir="2700000">
+            <a:outerShdw blurRad="177800" dist="50800" dir="2700000" algn="bl" rotWithShape="0">
               <a:srgbClr val="0F1310">
                 <a:alpha val="55000"/>
               </a:srgbClr>
@@ -3919,7 +3701,7 @@
           <a:bodyPr wrap="square" lIns="0" tIns="0" rIns="0" bIns="0" rtlCol="0" anchor="ctr"/>
           <a:lstStyle/>
           <a:p>
-            <a:pPr indent="0" marL="0">
+            <a:pPr marL="0" indent="0">
               <a:buNone/>
             </a:pPr>
             <a:r>
@@ -3958,7 +3740,7 @@
           <a:bodyPr wrap="square" lIns="0" tIns="0" rIns="0" bIns="0" rtlCol="0" anchor="ctr"/>
           <a:lstStyle/>
           <a:p>
-            <a:pPr indent="0" marL="0">
+            <a:pPr marL="0" indent="0">
               <a:lnSpc>
                 <a:spcPts val="1900"/>
               </a:lnSpc>
@@ -4005,7 +3787,7 @@
             <a:prstDash val="solid"/>
           </a:ln>
           <a:effectLst>
-            <a:outerShdw sx="100000" sy="100000" kx="0" ky="0" algn="bl" rotWithShape="0" blurRad="177800" dist="50800" dir="2700000">
+            <a:outerShdw blurRad="177800" dist="50800" dir="2700000" algn="bl" rotWithShape="0">
               <a:srgbClr val="0F1310">
                 <a:alpha val="55000"/>
               </a:srgbClr>
@@ -4059,7 +3841,7 @@
           <a:bodyPr wrap="square" lIns="0" tIns="0" rIns="0" bIns="0" rtlCol="0" anchor="ctr"/>
           <a:lstStyle/>
           <a:p>
-            <a:pPr indent="0" marL="0">
+            <a:pPr marL="0" indent="0">
               <a:buNone/>
             </a:pPr>
             <a:r>
@@ -4098,7 +3880,7 @@
           <a:bodyPr wrap="square" lIns="0" tIns="0" rIns="0" bIns="0" rtlCol="0" anchor="ctr"/>
           <a:lstStyle/>
           <a:p>
-            <a:pPr indent="0" marL="0">
+            <a:pPr marL="0" indent="0">
               <a:lnSpc>
                 <a:spcPts val="1900"/>
               </a:lnSpc>
@@ -4135,6 +3917,7 @@
         <a:solidFill>
           <a:srgbClr val="1F2421"/>
         </a:solidFill>
+        <a:effectLst/>
       </p:bgPr>
     </p:bg>
     <p:spTree>
@@ -4172,11 +3955,11 @@
           <a:bodyPr wrap="square" lIns="0" tIns="0" rIns="0" bIns="0" rtlCol="0" anchor="ctr"/>
           <a:lstStyle/>
           <a:p>
-            <a:pPr indent="0" marL="0">
-              <a:buNone/>
-            </a:pPr>
-            <a:r>
-              <a:rPr lang="en-US" sz="1000" spc="200" kern="0" dirty="0">
+            <a:pPr marL="0" indent="0">
+              <a:buNone/>
+            </a:pPr>
+            <a:r>
+              <a:rPr lang="en-US" sz="1000" kern="0" spc="200" dirty="0">
                 <a:solidFill>
                   <a:srgbClr val="2BCDB6"/>
                 </a:solidFill>
@@ -4211,7 +3994,7 @@
           <a:bodyPr wrap="square" lIns="0" tIns="0" rIns="0" bIns="0" rtlCol="0" anchor="ctr"/>
           <a:lstStyle/>
           <a:p>
-            <a:pPr indent="0" marL="0">
+            <a:pPr marL="0" indent="0">
               <a:buNone/>
             </a:pPr>
             <a:r>
@@ -4250,7 +4033,7 @@
           <a:bodyPr wrap="square" lIns="0" tIns="0" rIns="0" bIns="0" rtlCol="0" anchor="ctr"/>
           <a:lstStyle/>
           <a:p>
-            <a:pPr indent="0" marL="0">
+            <a:pPr marL="0" indent="0">
               <a:buNone/>
             </a:pPr>
             <a:r>
@@ -4294,7 +4077,7 @@
             <a:prstDash val="solid"/>
           </a:ln>
           <a:effectLst>
-            <a:outerShdw sx="100000" sy="100000" kx="0" ky="0" algn="bl" rotWithShape="0" blurRad="177800" dist="50800" dir="2700000">
+            <a:outerShdw blurRad="177800" dist="50800" dir="2700000" algn="bl" rotWithShape="0">
               <a:srgbClr val="0F1310">
                 <a:alpha val="55000"/>
               </a:srgbClr>
@@ -4323,11 +4106,11 @@
           <a:bodyPr wrap="square" lIns="0" tIns="0" rIns="0" bIns="0" rtlCol="0" anchor="ctr"/>
           <a:lstStyle/>
           <a:p>
-            <a:pPr indent="0" marL="0">
-              <a:buNone/>
-            </a:pPr>
-            <a:r>
-              <a:rPr lang="en-US" sz="1000" spc="200" kern="0" dirty="0">
+            <a:pPr marL="0" indent="0">
+              <a:buNone/>
+            </a:pPr>
+            <a:r>
+              <a:rPr lang="en-US" sz="1000" kern="0" spc="200" dirty="0">
                 <a:solidFill>
                   <a:srgbClr val="78817B"/>
                 </a:solidFill>
@@ -4362,7 +4145,7 @@
           <a:bodyPr wrap="square" lIns="0" tIns="0" rIns="0" bIns="0" rtlCol="0" anchor="ctr"/>
           <a:lstStyle/>
           <a:p>
-            <a:pPr indent="0" marL="0">
+            <a:pPr marL="0" indent="0">
               <a:buNone/>
             </a:pPr>
             <a:r>
@@ -4401,11 +4184,11 @@
           <a:bodyPr wrap="square" lIns="0" tIns="0" rIns="0" bIns="0" rtlCol="0" anchor="ctr"/>
           <a:lstStyle/>
           <a:p>
-            <a:pPr indent="0" marL="0">
-              <a:buNone/>
-            </a:pPr>
-            <a:r>
-              <a:rPr lang="en-US" sz="1000" spc="200" kern="0" dirty="0">
+            <a:pPr marL="0" indent="0">
+              <a:buNone/>
+            </a:pPr>
+            <a:r>
+              <a:rPr lang="en-US" sz="1000" kern="0" spc="200" dirty="0">
                 <a:solidFill>
                   <a:srgbClr val="2BCDB6"/>
                 </a:solidFill>
@@ -4440,7 +4223,7 @@
           <a:bodyPr wrap="square" lIns="0" tIns="0" rIns="0" bIns="0" rtlCol="0" anchor="ctr"/>
           <a:lstStyle/>
           <a:p>
-            <a:pPr indent="0" marL="0">
+            <a:pPr marL="0" indent="0">
               <a:lnSpc>
                 <a:spcPts val="2200"/>
               </a:lnSpc>
@@ -4490,51 +4273,26 @@
       </p:sp>
       <p:sp>
         <p:nvSpPr>
-          <p:cNvPr id="11" name="Shape 9"/>
-          <p:cNvSpPr/>
-          <p:nvPr/>
-        </p:nvSpPr>
-        <p:spPr>
-          <a:xfrm>
-            <a:off x="1234440" y="4892040"/>
-            <a:ext cx="146304" cy="146304"/>
-          </a:xfrm>
-          <a:prstGeom prst="ellipse">
-            <a:avLst/>
-          </a:prstGeom>
-          <a:solidFill>
-            <a:srgbClr val="E8993F"/>
-          </a:solidFill>
-          <a:ln w="12700">
-            <a:solidFill>
-              <a:srgbClr val="E8993F"/>
-            </a:solidFill>
-            <a:prstDash val="solid"/>
-          </a:ln>
-        </p:spPr>
-      </p:sp>
-      <p:sp>
-        <p:nvSpPr>
           <p:cNvPr id="12" name="Text 10"/>
           <p:cNvSpPr/>
           <p:nvPr/>
         </p:nvSpPr>
         <p:spPr>
           <a:xfrm>
-            <a:off x="1508760" y="4709160"/>
-            <a:ext cx="5715000" cy="594360"/>
-          </a:xfrm>
-          <a:prstGeom prst="rect">
-            <a:avLst/>
-          </a:prstGeom>
-          <a:noFill/>
-          <a:ln/>
-        </p:spPr>
-        <p:txBody>
-          <a:bodyPr wrap="square" lIns="0" tIns="0" rIns="0" bIns="0" rtlCol="0" anchor="ctr"/>
-          <a:lstStyle/>
-          <a:p>
-            <a:pPr indent="0" marL="0">
+            <a:off x="1477108" y="4709160"/>
+            <a:ext cx="5746652" cy="594360"/>
+          </a:xfrm>
+          <a:prstGeom prst="rect">
+            <a:avLst/>
+          </a:prstGeom>
+          <a:noFill/>
+          <a:ln/>
+        </p:spPr>
+        <p:txBody>
+          <a:bodyPr wrap="square" lIns="0" tIns="0" rIns="0" bIns="0" rtlCol="0" anchor="ctr"/>
+          <a:lstStyle/>
+          <a:p>
+            <a:pPr marL="0" indent="0">
               <a:buNone/>
             </a:pPr>
             <a:r>
@@ -4578,7 +4336,7 @@
             <a:prstDash val="solid"/>
           </a:ln>
           <a:effectLst>
-            <a:outerShdw sx="100000" sy="100000" kx="0" ky="0" algn="bl" rotWithShape="0" blurRad="177800" dist="50800" dir="2700000">
+            <a:outerShdw blurRad="177800" dist="50800" dir="2700000" algn="bl" rotWithShape="0">
               <a:srgbClr val="0F1310">
                 <a:alpha val="55000"/>
               </a:srgbClr>
@@ -4607,11 +4365,11 @@
           <a:bodyPr wrap="square" lIns="0" tIns="0" rIns="0" bIns="0" rtlCol="0" anchor="ctr"/>
           <a:lstStyle/>
           <a:p>
-            <a:pPr indent="0" marL="0">
-              <a:buNone/>
-            </a:pPr>
-            <a:r>
-              <a:rPr lang="en-US" sz="1000" spc="200" kern="0" dirty="0">
+            <a:pPr marL="0" indent="0">
+              <a:buNone/>
+            </a:pPr>
+            <a:r>
+              <a:rPr lang="en-US" sz="1000" kern="0" spc="200" dirty="0">
                 <a:solidFill>
                   <a:srgbClr val="2BCDB6"/>
                 </a:solidFill>
@@ -4646,7 +4404,7 @@
           <a:bodyPr wrap="square" lIns="0" tIns="0" rIns="0" bIns="0" rtlCol="0" anchor="ctr"/>
           <a:lstStyle/>
           <a:p>
-            <a:pPr indent="0" marL="0">
+            <a:pPr marL="0" indent="0">
               <a:buNone/>
             </a:pPr>
             <a:r>
@@ -4685,7 +4443,7 @@
           <a:bodyPr wrap="square" lIns="0" tIns="0" rIns="0" bIns="0" rtlCol="0" anchor="ctr"/>
           <a:lstStyle/>
           <a:p>
-            <a:pPr indent="0" marL="0">
+            <a:pPr marL="0" indent="0">
               <a:buNone/>
             </a:pPr>
             <a:r>
@@ -4724,7 +4482,7 @@
           <a:bodyPr wrap="square" lIns="0" tIns="0" rIns="0" bIns="0" rtlCol="0" anchor="ctr"/>
           <a:lstStyle/>
           <a:p>
-            <a:pPr indent="0" marL="0">
+            <a:pPr marL="0" indent="0">
               <a:buNone/>
             </a:pPr>
             <a:r>
@@ -4763,7 +4521,7 @@
           <a:bodyPr wrap="square" lIns="0" tIns="0" rIns="0" bIns="0" rtlCol="0" anchor="ctr"/>
           <a:lstStyle/>
           <a:p>
-            <a:pPr indent="0" marL="0">
+            <a:pPr marL="0" indent="0">
               <a:lnSpc>
                 <a:spcPts val="1800"/>
               </a:lnSpc>
@@ -4800,6 +4558,7 @@
         <a:solidFill>
           <a:srgbClr val="1F2421"/>
         </a:solidFill>
+        <a:effectLst/>
       </p:bgPr>
     </p:bg>
     <p:spTree>
@@ -4837,11 +4596,11 @@
           <a:bodyPr wrap="square" lIns="0" tIns="0" rIns="0" bIns="0" rtlCol="0" anchor="ctr"/>
           <a:lstStyle/>
           <a:p>
-            <a:pPr indent="0" marL="0">
-              <a:buNone/>
-            </a:pPr>
-            <a:r>
-              <a:rPr lang="en-US" sz="1000" spc="200" kern="0" dirty="0">
+            <a:pPr marL="0" indent="0">
+              <a:buNone/>
+            </a:pPr>
+            <a:r>
+              <a:rPr lang="en-US" sz="1000" kern="0" spc="200" dirty="0">
                 <a:solidFill>
                   <a:srgbClr val="78817B"/>
                 </a:solidFill>
@@ -4876,7 +4635,7 @@
           <a:bodyPr wrap="square" lIns="0" tIns="0" rIns="0" bIns="0" rtlCol="0" anchor="ctr"/>
           <a:lstStyle/>
           <a:p>
-            <a:pPr indent="0" marL="0">
+            <a:pPr marL="0" indent="0">
               <a:buNone/>
             </a:pPr>
             <a:r>
@@ -4920,7 +4679,7 @@
             <a:prstDash val="solid"/>
           </a:ln>
           <a:effectLst>
-            <a:outerShdw sx="100000" sy="100000" kx="0" ky="0" algn="bl" rotWithShape="0" blurRad="177800" dist="50800" dir="2700000">
+            <a:outerShdw blurRad="177800" dist="50800" dir="2700000" algn="bl" rotWithShape="0">
               <a:srgbClr val="0F1310">
                 <a:alpha val="55000"/>
               </a:srgbClr>
@@ -4949,7 +4708,7 @@
           <a:bodyPr wrap="square" lIns="0" tIns="0" rIns="0" bIns="0" rtlCol="0" anchor="ctr"/>
           <a:lstStyle/>
           <a:p>
-            <a:pPr indent="0" marL="0">
+            <a:pPr marL="0" indent="0">
               <a:buNone/>
             </a:pPr>
             <a:r>
@@ -4988,7 +4747,7 @@
           <a:bodyPr wrap="square" lIns="0" tIns="0" rIns="0" bIns="0" rtlCol="0" anchor="ctr"/>
           <a:lstStyle/>
           <a:p>
-            <a:pPr indent="0" marL="0">
+            <a:pPr marL="0" indent="0">
               <a:buNone/>
             </a:pPr>
             <a:r>
@@ -5027,7 +4786,7 @@
           <a:bodyPr wrap="square" lIns="0" tIns="0" rIns="0" bIns="0" rtlCol="0" anchor="ctr"/>
           <a:lstStyle/>
           <a:p>
-            <a:pPr indent="0" marL="0">
+            <a:pPr marL="0" indent="0">
               <a:lnSpc>
                 <a:spcPts val="1900"/>
               </a:lnSpc>
@@ -5069,7 +4828,7 @@
           <a:bodyPr wrap="square" lIns="0" tIns="0" rIns="0" bIns="0" rtlCol="0" anchor="ctr"/>
           <a:lstStyle/>
           <a:p>
-            <a:pPr algn="ctr" indent="0" marL="0">
+            <a:pPr marL="0" indent="0" algn="ctr">
               <a:buNone/>
             </a:pPr>
             <a:r>
@@ -5113,7 +4872,7 @@
             <a:prstDash val="solid"/>
           </a:ln>
           <a:effectLst>
-            <a:outerShdw sx="100000" sy="100000" kx="0" ky="0" algn="bl" rotWithShape="0" blurRad="177800" dist="50800" dir="2700000">
+            <a:outerShdw blurRad="177800" dist="50800" dir="2700000" algn="bl" rotWithShape="0">
               <a:srgbClr val="0F1310">
                 <a:alpha val="55000"/>
               </a:srgbClr>
@@ -5142,7 +4901,7 @@
           <a:bodyPr wrap="square" lIns="0" tIns="0" rIns="0" bIns="0" rtlCol="0" anchor="ctr"/>
           <a:lstStyle/>
           <a:p>
-            <a:pPr indent="0" marL="0">
+            <a:pPr marL="0" indent="0">
               <a:buNone/>
             </a:pPr>
             <a:r>
@@ -5181,7 +4940,7 @@
           <a:bodyPr wrap="square" lIns="0" tIns="0" rIns="0" bIns="0" rtlCol="0" anchor="ctr"/>
           <a:lstStyle/>
           <a:p>
-            <a:pPr indent="0" marL="0">
+            <a:pPr marL="0" indent="0">
               <a:buNone/>
             </a:pPr>
             <a:r>
@@ -5220,7 +4979,7 @@
           <a:bodyPr wrap="square" lIns="0" tIns="0" rIns="0" bIns="0" rtlCol="0" anchor="ctr"/>
           <a:lstStyle/>
           <a:p>
-            <a:pPr indent="0" marL="0">
+            <a:pPr marL="0" indent="0">
               <a:lnSpc>
                 <a:spcPts val="1900"/>
               </a:lnSpc>
@@ -5262,7 +5021,7 @@
           <a:bodyPr wrap="square" lIns="0" tIns="0" rIns="0" bIns="0" rtlCol="0" anchor="ctr"/>
           <a:lstStyle/>
           <a:p>
-            <a:pPr algn="ctr" indent="0" marL="0">
+            <a:pPr marL="0" indent="0" algn="ctr">
               <a:buNone/>
             </a:pPr>
             <a:r>
@@ -5306,7 +5065,7 @@
             <a:prstDash val="solid"/>
           </a:ln>
           <a:effectLst>
-            <a:outerShdw sx="100000" sy="100000" kx="0" ky="0" algn="bl" rotWithShape="0" blurRad="177800" dist="50800" dir="2700000">
+            <a:outerShdw blurRad="177800" dist="50800" dir="2700000" algn="bl" rotWithShape="0">
               <a:srgbClr val="0F1310">
                 <a:alpha val="55000"/>
               </a:srgbClr>
@@ -5335,7 +5094,7 @@
           <a:bodyPr wrap="square" lIns="0" tIns="0" rIns="0" bIns="0" rtlCol="0" anchor="ctr"/>
           <a:lstStyle/>
           <a:p>
-            <a:pPr indent="0" marL="0">
+            <a:pPr marL="0" indent="0">
               <a:buNone/>
             </a:pPr>
             <a:r>
@@ -5374,7 +5133,7 @@
           <a:bodyPr wrap="square" lIns="0" tIns="0" rIns="0" bIns="0" rtlCol="0" anchor="ctr"/>
           <a:lstStyle/>
           <a:p>
-            <a:pPr indent="0" marL="0">
+            <a:pPr marL="0" indent="0">
               <a:buNone/>
             </a:pPr>
             <a:r>
@@ -5413,7 +5172,7 @@
           <a:bodyPr wrap="square" lIns="0" tIns="0" rIns="0" bIns="0" rtlCol="0" anchor="ctr"/>
           <a:lstStyle/>
           <a:p>
-            <a:pPr indent="0" marL="0">
+            <a:pPr marL="0" indent="0">
               <a:lnSpc>
                 <a:spcPts val="1900"/>
               </a:lnSpc>
@@ -5455,7 +5214,7 @@
           <a:bodyPr wrap="square" lIns="0" tIns="0" rIns="0" bIns="0" rtlCol="0" anchor="ctr"/>
           <a:lstStyle/>
           <a:p>
-            <a:pPr indent="0" marL="0">
+            <a:pPr marL="0" indent="0">
               <a:lnSpc>
                 <a:spcPts val="2200"/>
               </a:lnSpc>
@@ -5492,6 +5251,7 @@
         <a:solidFill>
           <a:srgbClr val="1F2421"/>
         </a:solidFill>
+        <a:effectLst/>
       </p:bgPr>
     </p:bg>
     <p:spTree>
@@ -5529,11 +5289,11 @@
           <a:bodyPr wrap="square" lIns="0" tIns="0" rIns="0" bIns="0" rtlCol="0" anchor="ctr"/>
           <a:lstStyle/>
           <a:p>
-            <a:pPr indent="0" marL="0">
-              <a:buNone/>
-            </a:pPr>
-            <a:r>
-              <a:rPr lang="en-US" sz="1000" spc="200" kern="0" dirty="0">
+            <a:pPr marL="0" indent="0">
+              <a:buNone/>
+            </a:pPr>
+            <a:r>
+              <a:rPr lang="en-US" sz="1000" kern="0" spc="200" dirty="0">
                 <a:solidFill>
                   <a:srgbClr val="78817B"/>
                 </a:solidFill>
@@ -5568,7 +5328,7 @@
           <a:bodyPr wrap="square" lIns="0" tIns="0" rIns="0" bIns="0" rtlCol="0" anchor="ctr"/>
           <a:lstStyle/>
           <a:p>
-            <a:pPr indent="0" marL="0">
+            <a:pPr marL="0" indent="0">
               <a:buNone/>
             </a:pPr>
             <a:r>
@@ -5612,7 +5372,7 @@
             <a:prstDash val="solid"/>
           </a:ln>
           <a:effectLst>
-            <a:outerShdw sx="100000" sy="100000" kx="0" ky="0" algn="bl" rotWithShape="0" blurRad="177800" dist="50800" dir="2700000">
+            <a:outerShdw blurRad="177800" dist="50800" dir="2700000" algn="bl" rotWithShape="0">
               <a:srgbClr val="0F1310">
                 <a:alpha val="55000"/>
               </a:srgbClr>
@@ -5641,7 +5401,7 @@
           <a:bodyPr wrap="square" lIns="0" tIns="0" rIns="0" bIns="0" rtlCol="0" anchor="ctr"/>
           <a:lstStyle/>
           <a:p>
-            <a:pPr indent="0" marL="0">
+            <a:pPr marL="0" indent="0">
               <a:buNone/>
             </a:pPr>
             <a:r>
@@ -5680,7 +5440,7 @@
           <a:bodyPr wrap="square" lIns="0" tIns="0" rIns="0" bIns="0" rtlCol="0" anchor="ctr"/>
           <a:lstStyle/>
           <a:p>
-            <a:pPr indent="0" marL="0">
+            <a:pPr marL="0" indent="0">
               <a:lnSpc>
                 <a:spcPts val="1700"/>
               </a:lnSpc>
@@ -5727,7 +5487,7 @@
             <a:prstDash val="solid"/>
           </a:ln>
           <a:effectLst>
-            <a:outerShdw sx="100000" sy="100000" kx="0" ky="0" algn="bl" rotWithShape="0" blurRad="177800" dist="50800" dir="2700000">
+            <a:outerShdw blurRad="177800" dist="50800" dir="2700000" algn="bl" rotWithShape="0">
               <a:srgbClr val="0F1310">
                 <a:alpha val="55000"/>
               </a:srgbClr>
@@ -5756,7 +5516,7 @@
           <a:bodyPr wrap="square" lIns="0" tIns="0" rIns="0" bIns="0" rtlCol="0" anchor="ctr"/>
           <a:lstStyle/>
           <a:p>
-            <a:pPr indent="0" marL="0">
+            <a:pPr marL="0" indent="0">
               <a:buNone/>
             </a:pPr>
             <a:r>
@@ -5795,7 +5555,7 @@
           <a:bodyPr wrap="square" lIns="0" tIns="0" rIns="0" bIns="0" rtlCol="0" anchor="ctr"/>
           <a:lstStyle/>
           <a:p>
-            <a:pPr indent="0" marL="0">
+            <a:pPr marL="0" indent="0">
               <a:lnSpc>
                 <a:spcPts val="1700"/>
               </a:lnSpc>
@@ -5842,7 +5602,7 @@
             <a:prstDash val="solid"/>
           </a:ln>
           <a:effectLst>
-            <a:outerShdw sx="100000" sy="100000" kx="0" ky="0" algn="bl" rotWithShape="0" blurRad="177800" dist="50800" dir="2700000">
+            <a:outerShdw blurRad="177800" dist="50800" dir="2700000" algn="bl" rotWithShape="0">
               <a:srgbClr val="0F1310">
                 <a:alpha val="55000"/>
               </a:srgbClr>
@@ -5871,7 +5631,7 @@
           <a:bodyPr wrap="square" lIns="0" tIns="0" rIns="0" bIns="0" rtlCol="0" anchor="ctr"/>
           <a:lstStyle/>
           <a:p>
-            <a:pPr indent="0" marL="0">
+            <a:pPr marL="0" indent="0">
               <a:buNone/>
             </a:pPr>
             <a:r>
@@ -5910,7 +5670,7 @@
           <a:bodyPr wrap="square" lIns="0" tIns="0" rIns="0" bIns="0" rtlCol="0" anchor="ctr"/>
           <a:lstStyle/>
           <a:p>
-            <a:pPr indent="0" marL="0">
+            <a:pPr marL="0" indent="0">
               <a:lnSpc>
                 <a:spcPts val="1700"/>
               </a:lnSpc>
@@ -5957,7 +5717,7 @@
             <a:prstDash val="solid"/>
           </a:ln>
           <a:effectLst>
-            <a:outerShdw sx="100000" sy="100000" kx="0" ky="0" algn="bl" rotWithShape="0" blurRad="177800" dist="50800" dir="2700000">
+            <a:outerShdw blurRad="177800" dist="50800" dir="2700000" algn="bl" rotWithShape="0">
               <a:srgbClr val="0F1310">
                 <a:alpha val="55000"/>
               </a:srgbClr>
@@ -5986,7 +5746,7 @@
           <a:bodyPr wrap="square" lIns="0" tIns="0" rIns="0" bIns="0" rtlCol="0" anchor="ctr"/>
           <a:lstStyle/>
           <a:p>
-            <a:pPr indent="0" marL="0">
+            <a:pPr marL="0" indent="0">
               <a:buNone/>
             </a:pPr>
             <a:r>
@@ -6025,7 +5785,7 @@
           <a:bodyPr wrap="square" lIns="0" tIns="0" rIns="0" bIns="0" rtlCol="0" anchor="ctr"/>
           <a:lstStyle/>
           <a:p>
-            <a:pPr indent="0" marL="0">
+            <a:pPr marL="0" indent="0">
               <a:lnSpc>
                 <a:spcPts val="1700"/>
               </a:lnSpc>
@@ -6072,7 +5832,7 @@
             <a:prstDash val="solid"/>
           </a:ln>
           <a:effectLst>
-            <a:outerShdw sx="100000" sy="100000" kx="0" ky="0" algn="bl" rotWithShape="0" blurRad="177800" dist="50800" dir="2700000">
+            <a:outerShdw blurRad="177800" dist="50800" dir="2700000" algn="bl" rotWithShape="0">
               <a:srgbClr val="0F1310">
                 <a:alpha val="55000"/>
               </a:srgbClr>
@@ -6101,7 +5861,7 @@
           <a:bodyPr wrap="square" lIns="0" tIns="0" rIns="0" bIns="0" rtlCol="0" anchor="ctr"/>
           <a:lstStyle/>
           <a:p>
-            <a:pPr indent="0" marL="0">
+            <a:pPr marL="0" indent="0">
               <a:buNone/>
             </a:pPr>
             <a:r>
@@ -6140,7 +5900,7 @@
           <a:bodyPr wrap="square" lIns="0" tIns="0" rIns="0" bIns="0" rtlCol="0" anchor="ctr"/>
           <a:lstStyle/>
           <a:p>
-            <a:pPr indent="0" marL="0">
+            <a:pPr marL="0" indent="0">
               <a:lnSpc>
                 <a:spcPts val="1700"/>
               </a:lnSpc>
@@ -6187,7 +5947,7 @@
             <a:prstDash val="solid"/>
           </a:ln>
           <a:effectLst>
-            <a:outerShdw sx="100000" sy="100000" kx="0" ky="0" algn="bl" rotWithShape="0" blurRad="177800" dist="50800" dir="2700000">
+            <a:outerShdw blurRad="177800" dist="50800" dir="2700000" algn="bl" rotWithShape="0">
               <a:srgbClr val="0F1310">
                 <a:alpha val="55000"/>
               </a:srgbClr>
@@ -6216,7 +5976,7 @@
           <a:bodyPr wrap="square" lIns="0" tIns="0" rIns="0" bIns="0" rtlCol="0" anchor="ctr"/>
           <a:lstStyle/>
           <a:p>
-            <a:pPr indent="0" marL="0">
+            <a:pPr marL="0" indent="0">
               <a:buNone/>
             </a:pPr>
             <a:r>
@@ -6255,7 +6015,7 @@
           <a:bodyPr wrap="square" lIns="0" tIns="0" rIns="0" bIns="0" rtlCol="0" anchor="ctr"/>
           <a:lstStyle/>
           <a:p>
-            <a:pPr indent="0" marL="0">
+            <a:pPr marL="0" indent="0">
               <a:lnSpc>
                 <a:spcPts val="1700"/>
               </a:lnSpc>
@@ -6292,6 +6052,7 @@
         <a:solidFill>
           <a:srgbClr val="1F2421"/>
         </a:solidFill>
+        <a:effectLst/>
       </p:bgPr>
     </p:bg>
     <p:spTree>
@@ -6427,11 +6188,11 @@
           <a:bodyPr wrap="square" lIns="0" tIns="0" rIns="0" bIns="0" rtlCol="0" anchor="ctr"/>
           <a:lstStyle/>
           <a:p>
-            <a:pPr indent="0" marL="0">
-              <a:buNone/>
-            </a:pPr>
-            <a:r>
-              <a:rPr lang="en-US" sz="1000" spc="200" kern="0" dirty="0">
+            <a:pPr marL="0" indent="0">
+              <a:buNone/>
+            </a:pPr>
+            <a:r>
+              <a:rPr lang="en-US" sz="1000" kern="0" spc="200" dirty="0">
                 <a:solidFill>
                   <a:srgbClr val="2BCDB6"/>
                 </a:solidFill>
@@ -6466,7 +6227,7 @@
           <a:bodyPr wrap="square" lIns="0" tIns="0" rIns="0" bIns="0" rtlCol="0" anchor="ctr"/>
           <a:lstStyle/>
           <a:p>
-            <a:pPr indent="0" marL="0">
+            <a:pPr marL="0" indent="0">
               <a:lnSpc>
                 <a:spcPts val="5400"/>
               </a:lnSpc>
@@ -6486,7 +6247,7 @@
             <a:endParaRPr lang="en-US" sz="4400" dirty="0"/>
           </a:p>
           <a:p>
-            <a:pPr indent="0" marL="0">
+            <a:pPr marL="0" indent="0">
               <a:lnSpc>
                 <a:spcPts val="5400"/>
               </a:lnSpc>
@@ -6528,7 +6289,7 @@
           <a:bodyPr wrap="square" lIns="0" tIns="0" rIns="0" bIns="0" rtlCol="0" anchor="ctr"/>
           <a:lstStyle/>
           <a:p>
-            <a:pPr indent="0" marL="0">
+            <a:pPr marL="0" indent="0">
               <a:buNone/>
             </a:pPr>
             <a:r>
@@ -6567,11 +6328,11 @@
           <a:bodyPr wrap="square" lIns="0" tIns="0" rIns="0" bIns="0" rtlCol="0" anchor="ctr"/>
           <a:lstStyle/>
           <a:p>
-            <a:pPr indent="0" marL="0">
-              <a:buNone/>
-            </a:pPr>
-            <a:r>
-              <a:rPr lang="en-US" sz="1100" spc="150" kern="0" dirty="0">
+            <a:pPr marL="0" indent="0">
+              <a:buNone/>
+            </a:pPr>
+            <a:r>
+              <a:rPr lang="en-US" sz="1400" kern="0" spc="150" dirty="0">
                 <a:solidFill>
                   <a:srgbClr val="78817B"/>
                 </a:solidFill>
@@ -6581,7 +6342,138 @@
               </a:rPr>
               <a:t>Thank you — questions welcome.</a:t>
             </a:r>
-            <a:endParaRPr lang="en-US" sz="1100" dirty="0"/>
+            <a:endParaRPr lang="en-US" sz="1400" dirty="0"/>
+          </a:p>
+        </p:txBody>
+      </p:sp>
+      <p:sp>
+        <p:nvSpPr>
+          <p:cNvPr id="10" name="TextBox 9">
+            <a:extLst>
+              <a:ext uri="{FF2B5EF4-FFF2-40B4-BE49-F238E27FC236}">
+                <a16:creationId xmlns:a16="http://schemas.microsoft.com/office/drawing/2014/main" id="{89E42662-5149-4FB2-8A46-4D3B098AA083}"/>
+              </a:ext>
+            </a:extLst>
+          </p:cNvPr>
+          <p:cNvSpPr txBox="1"/>
+          <p:nvPr/>
+        </p:nvSpPr>
+        <p:spPr>
+          <a:xfrm>
+            <a:off x="640080" y="4234644"/>
+            <a:ext cx="3352906" cy="1200329"/>
+          </a:xfrm>
+          <a:prstGeom prst="rect">
+            <a:avLst/>
+          </a:prstGeom>
+          <a:noFill/>
+        </p:spPr>
+        <p:txBody>
+          <a:bodyPr wrap="none" rtlCol="0">
+            <a:spAutoFit/>
+          </a:bodyPr>
+          <a:lstStyle/>
+          <a:p>
+            <a:r>
+              <a:rPr lang="en-US" i="1" dirty="0">
+                <a:solidFill>
+                  <a:schemeClr val="bg1">
+                    <a:lumMod val="95000"/>
+                  </a:schemeClr>
+                </a:solidFill>
+              </a:rPr>
+              <a:t>Built by</a:t>
+            </a:r>
+          </a:p>
+          <a:p>
+            <a:r>
+              <a:rPr lang="en-US" i="1" dirty="0">
+                <a:solidFill>
+                  <a:schemeClr val="bg1">
+                    <a:lumMod val="95000"/>
+                  </a:schemeClr>
+                </a:solidFill>
+              </a:rPr>
+              <a:t>Aarush </a:t>
+            </a:r>
+            <a:r>
+              <a:rPr lang="en-US" i="1" dirty="0" err="1">
+                <a:solidFill>
+                  <a:schemeClr val="bg1">
+                    <a:lumMod val="95000"/>
+                  </a:schemeClr>
+                </a:solidFill>
+              </a:rPr>
+              <a:t>Sonker</a:t>
+            </a:r>
+            <a:endParaRPr lang="en-US" i="1" dirty="0">
+              <a:solidFill>
+                <a:schemeClr val="bg1">
+                  <a:lumMod val="95000"/>
+                </a:schemeClr>
+              </a:solidFill>
+            </a:endParaRPr>
+          </a:p>
+          <a:p>
+            <a:r>
+              <a:rPr lang="en-US" i="1" dirty="0">
+                <a:solidFill>
+                  <a:schemeClr val="bg1">
+                    <a:lumMod val="95000"/>
+                  </a:schemeClr>
+                </a:solidFill>
+              </a:rPr>
+              <a:t>Ishan </a:t>
+            </a:r>
+            <a:r>
+              <a:rPr lang="en-US" i="1" dirty="0" err="1">
+                <a:solidFill>
+                  <a:schemeClr val="bg1">
+                    <a:lumMod val="95000"/>
+                  </a:schemeClr>
+                </a:solidFill>
+              </a:rPr>
+              <a:t>Asati</a:t>
+            </a:r>
+            <a:endParaRPr lang="en-US" i="1" dirty="0">
+              <a:solidFill>
+                <a:schemeClr val="bg1">
+                  <a:lumMod val="95000"/>
+                </a:schemeClr>
+              </a:solidFill>
+            </a:endParaRPr>
+          </a:p>
+          <a:p>
+            <a:r>
+              <a:rPr lang="en-US" i="1" dirty="0">
+                <a:solidFill>
+                  <a:schemeClr val="bg1">
+                    <a:lumMod val="95000"/>
+                  </a:schemeClr>
+                </a:solidFill>
+              </a:rPr>
+              <a:t>GD </a:t>
+            </a:r>
+            <a:r>
+              <a:rPr lang="en-US" i="1" dirty="0" err="1">
+                <a:solidFill>
+                  <a:schemeClr val="bg1">
+                    <a:lumMod val="95000"/>
+                  </a:schemeClr>
+                </a:solidFill>
+              </a:rPr>
+              <a:t>Goenka</a:t>
+            </a:r>
+            <a:r>
+              <a:rPr lang="en-US" i="1" dirty="0">
+                <a:solidFill>
+                  <a:schemeClr val="bg1">
+                    <a:lumMod val="95000"/>
+                  </a:schemeClr>
+                </a:solidFill>
+              </a:rPr>
+              <a:t> Public School, Dwarka</a:t>
+            </a:r>
           </a:p>
         </p:txBody>
       </p:sp>
@@ -6886,4 +6778,299 @@
     </a:ext>
   </a:extLst>
 </a:theme>
+</file>
+
+<file path=ppt/theme/theme2.xml><?xml version="1.0" encoding="utf-8"?>
+<a:theme xmlns:a="http://schemas.openxmlformats.org/drawingml/2006/main" name="Office Theme">
+  <a:themeElements>
+    <a:clrScheme name="Office">
+      <a:dk1>
+        <a:sysClr val="windowText" lastClr="000000"/>
+      </a:dk1>
+      <a:lt1>
+        <a:sysClr val="window" lastClr="FFFFFF"/>
+      </a:lt1>
+      <a:dk2>
+        <a:srgbClr val="44546A"/>
+      </a:dk2>
+      <a:lt2>
+        <a:srgbClr val="E7E6E6"/>
+      </a:lt2>
+      <a:accent1>
+        <a:srgbClr val="4472C4"/>
+      </a:accent1>
+      <a:accent2>
+        <a:srgbClr val="ED7D31"/>
+      </a:accent2>
+      <a:accent3>
+        <a:srgbClr val="A5A5A5"/>
+      </a:accent3>
+      <a:accent4>
+        <a:srgbClr val="FFC000"/>
+      </a:accent4>
+      <a:accent5>
+        <a:srgbClr val="5B9BD5"/>
+      </a:accent5>
+      <a:accent6>
+        <a:srgbClr val="70AD47"/>
+      </a:accent6>
+      <a:hlink>
+        <a:srgbClr val="0563C1"/>
+      </a:hlink>
+      <a:folHlink>
+        <a:srgbClr val="954F72"/>
+      </a:folHlink>
+    </a:clrScheme>
+    <a:fontScheme name="Office">
+      <a:majorFont>
+        <a:latin typeface="Calibri Light" panose="020F0302020204030204"/>
+        <a:ea typeface=""/>
+        <a:cs typeface=""/>
+        <a:font script="Jpan" typeface="游ゴシック Light"/>
+        <a:font script="Hang" typeface="맑은 고딕"/>
+        <a:font script="Hans" typeface="等线 Light"/>
+        <a:font script="Hant" typeface="新細明體"/>
+        <a:font script="Arab" typeface="Times New Roman"/>
+        <a:font script="Hebr" typeface="Times New Roman"/>
+        <a:font script="Thai" typeface="Angsana New"/>
+        <a:font script="Ethi" typeface="Nyala"/>
+        <a:font script="Beng" typeface="Vrinda"/>
+        <a:font script="Gujr" typeface="Shruti"/>
+        <a:font script="Khmr" typeface="MoolBoran"/>
+        <a:font script="Knda" typeface="Tunga"/>
+        <a:font script="Guru" typeface="Raavi"/>
+        <a:font script="Cans" typeface="Euphemia"/>
+        <a:font script="Cher" typeface="Plantagenet Cherokee"/>
+        <a:font script="Yiii" typeface="Microsoft Yi Baiti"/>
+        <a:font script="Tibt" typeface="Microsoft Himalaya"/>
+        <a:font script="Thaa" typeface="MV Boli"/>
+        <a:font script="Deva" typeface="Mangal"/>
+        <a:font script="Telu" typeface="Gautami"/>
+        <a:font script="Taml" typeface="Latha"/>
+        <a:font script="Syrc" typeface="Estrangelo Edessa"/>
+        <a:font script="Orya" typeface="Kalinga"/>
+        <a:font script="Mlym" typeface="Kartika"/>
+        <a:font script="Laoo" typeface="DokChampa"/>
+        <a:font script="Sinh" typeface="Iskoola Pota"/>
+        <a:font script="Mong" typeface="Mongolian Baiti"/>
+        <a:font script="Viet" typeface="Times New Roman"/>
+        <a:font script="Uigh" typeface="Microsoft Uighur"/>
+        <a:font script="Geor" typeface="Sylfaen"/>
+        <a:font script="Armn" typeface="Arial"/>
+        <a:font script="Bugi" typeface="Leelawadee UI"/>
+        <a:font script="Bopo" typeface="Microsoft JhengHei"/>
+        <a:font script="Java" typeface="Javanese Text"/>
+        <a:font script="Lisu" typeface="Segoe UI"/>
+        <a:font script="Mymr" typeface="Myanmar Text"/>
+        <a:font script="Nkoo" typeface="Ebrima"/>
+        <a:font script="Olck" typeface="Nirmala UI"/>
+        <a:font script="Osma" typeface="Ebrima"/>
+        <a:font script="Phag" typeface="Phagspa"/>
+        <a:font script="Syrn" typeface="Estrangelo Edessa"/>
+        <a:font script="Syrj" typeface="Estrangelo Edessa"/>
+        <a:font script="Syre" typeface="Estrangelo Edessa"/>
+        <a:font script="Sora" typeface="Nirmala UI"/>
+        <a:font script="Tale" typeface="Microsoft Tai Le"/>
+        <a:font script="Talu" typeface="Microsoft New Tai Lue"/>
+        <a:font script="Tfng" typeface="Ebrima"/>
+      </a:majorFont>
+      <a:minorFont>
+        <a:latin typeface="Calibri" panose="020F0502020204030204"/>
+        <a:ea typeface=""/>
+        <a:cs typeface=""/>
+        <a:font script="Jpan" typeface="游ゴシック"/>
+        <a:font script="Hang" typeface="맑은 고딕"/>
+        <a:font script="Hans" typeface="等线"/>
+        <a:font script="Hant" typeface="新細明體"/>
+        <a:font script="Arab" typeface="Arial"/>
+        <a:font script="Hebr" typeface="Arial"/>
+        <a:font script="Thai" typeface="Cordia New"/>
+        <a:font script="Ethi" typeface="Nyala"/>
+        <a:font script="Beng" typeface="Vrinda"/>
+        <a:font script="Gujr" typeface="Shruti"/>
+        <a:font script="Khmr" typeface="DaunPenh"/>
+        <a:font script="Knda" typeface="Tunga"/>
+        <a:font script="Guru" typeface="Raavi"/>
+        <a:font script="Cans" typeface="Euphemia"/>
+        <a:font script="Cher" typeface="Plantagenet Cherokee"/>
+        <a:font script="Yiii" typeface="Microsoft Yi Baiti"/>
+        <a:font script="Tibt" typeface="Microsoft Himalaya"/>
+        <a:font script="Thaa" typeface="MV Boli"/>
+        <a:font script="Deva" typeface="Mangal"/>
+        <a:font script="Telu" typeface="Gautami"/>
+        <a:font script="Taml" typeface="Latha"/>
+        <a:font script="Syrc" typeface="Estrangelo Edessa"/>
+        <a:font script="Orya" typeface="Kalinga"/>
+        <a:font script="Mlym" typeface="Kartika"/>
+        <a:font script="Laoo" typeface="DokChampa"/>
+        <a:font script="Sinh" typeface="Iskoola Pota"/>
+        <a:font script="Mong" typeface="Mongolian Baiti"/>
+        <a:font script="Viet" typeface="Arial"/>
+        <a:font script="Uigh" typeface="Microsoft Uighur"/>
+        <a:font script="Geor" typeface="Sylfaen"/>
+        <a:font script="Armn" typeface="Arial"/>
+        <a:font script="Bugi" typeface="Leelawadee UI"/>
+        <a:font script="Bopo" typeface="Microsoft JhengHei"/>
+        <a:font script="Java" typeface="Javanese Text"/>
+        <a:font script="Lisu" typeface="Segoe UI"/>
+        <a:font script="Mymr" typeface="Myanmar Text"/>
+        <a:font script="Nkoo" typeface="Ebrima"/>
+        <a:font script="Olck" typeface="Nirmala UI"/>
+        <a:font script="Osma" typeface="Ebrima"/>
+        <a:font script="Phag" typeface="Phagspa"/>
+        <a:font script="Syrn" typeface="Estrangelo Edessa"/>
+        <a:font script="Syrj" typeface="Estrangelo Edessa"/>
+        <a:font script="Syre" typeface="Estrangelo Edessa"/>
+        <a:font script="Sora" typeface="Nirmala UI"/>
+        <a:font script="Tale" typeface="Microsoft Tai Le"/>
+        <a:font script="Talu" typeface="Microsoft New Tai Lue"/>
+        <a:font script="Tfng" typeface="Ebrima"/>
+      </a:minorFont>
+    </a:fontScheme>
+    <a:fmtScheme name="Office">
+      <a:fillStyleLst>
+        <a:solidFill>
+          <a:schemeClr val="phClr"/>
+        </a:solidFill>
+        <a:gradFill rotWithShape="1">
+          <a:gsLst>
+            <a:gs pos="0">
+              <a:schemeClr val="phClr">
+                <a:lumMod val="110000"/>
+                <a:satMod val="105000"/>
+                <a:tint val="67000"/>
+              </a:schemeClr>
+            </a:gs>
+            <a:gs pos="50000">
+              <a:schemeClr val="phClr">
+                <a:lumMod val="105000"/>
+                <a:satMod val="103000"/>
+                <a:tint val="73000"/>
+              </a:schemeClr>
+            </a:gs>
+            <a:gs pos="100000">
+              <a:schemeClr val="phClr">
+                <a:lumMod val="105000"/>
+                <a:satMod val="109000"/>
+                <a:tint val="81000"/>
+              </a:schemeClr>
+            </a:gs>
+          </a:gsLst>
+          <a:lin ang="5400000" scaled="0"/>
+        </a:gradFill>
+        <a:gradFill rotWithShape="1">
+          <a:gsLst>
+            <a:gs pos="0">
+              <a:schemeClr val="phClr">
+                <a:satMod val="103000"/>
+                <a:lumMod val="102000"/>
+                <a:tint val="94000"/>
+              </a:schemeClr>
+            </a:gs>
+            <a:gs pos="50000">
+              <a:schemeClr val="phClr">
+                <a:satMod val="110000"/>
+                <a:lumMod val="100000"/>
+                <a:shade val="100000"/>
+              </a:schemeClr>
+            </a:gs>
+            <a:gs pos="100000">
+              <a:schemeClr val="phClr">
+                <a:lumMod val="99000"/>
+                <a:satMod val="120000"/>
+                <a:shade val="78000"/>
+              </a:schemeClr>
+            </a:gs>
+          </a:gsLst>
+          <a:lin ang="5400000" scaled="0"/>
+        </a:gradFill>
+      </a:fillStyleLst>
+      <a:lnStyleLst>
+        <a:ln w="6350" cap="flat" cmpd="sng" algn="ctr">
+          <a:solidFill>
+            <a:schemeClr val="phClr"/>
+          </a:solidFill>
+          <a:prstDash val="solid"/>
+          <a:miter lim="800000"/>
+        </a:ln>
+        <a:ln w="12700" cap="flat" cmpd="sng" algn="ctr">
+          <a:solidFill>
+            <a:schemeClr val="phClr"/>
+          </a:solidFill>
+          <a:prstDash val="solid"/>
+          <a:miter lim="800000"/>
+        </a:ln>
+        <a:ln w="19050" cap="flat" cmpd="sng" algn="ctr">
+          <a:solidFill>
+            <a:schemeClr val="phClr"/>
+          </a:solidFill>
+          <a:prstDash val="solid"/>
+          <a:miter lim="800000"/>
+        </a:ln>
+      </a:lnStyleLst>
+      <a:effectStyleLst>
+        <a:effectStyle>
+          <a:effectLst/>
+        </a:effectStyle>
+        <a:effectStyle>
+          <a:effectLst/>
+        </a:effectStyle>
+        <a:effectStyle>
+          <a:effectLst>
+            <a:outerShdw blurRad="57150" dist="19050" dir="5400000" algn="ctr" rotWithShape="0">
+              <a:srgbClr val="000000">
+                <a:alpha val="63000"/>
+              </a:srgbClr>
+            </a:outerShdw>
+          </a:effectLst>
+        </a:effectStyle>
+      </a:effectStyleLst>
+      <a:bgFillStyleLst>
+        <a:solidFill>
+          <a:schemeClr val="phClr"/>
+        </a:solidFill>
+        <a:solidFill>
+          <a:schemeClr val="phClr">
+            <a:tint val="95000"/>
+            <a:satMod val="170000"/>
+          </a:schemeClr>
+        </a:solidFill>
+        <a:gradFill rotWithShape="1">
+          <a:gsLst>
+            <a:gs pos="0">
+              <a:schemeClr val="phClr">
+                <a:tint val="93000"/>
+                <a:satMod val="150000"/>
+                <a:shade val="98000"/>
+                <a:lumMod val="102000"/>
+              </a:schemeClr>
+            </a:gs>
+            <a:gs pos="50000">
+              <a:schemeClr val="phClr">
+                <a:tint val="98000"/>
+                <a:satMod val="130000"/>
+                <a:shade val="90000"/>
+                <a:lumMod val="103000"/>
+              </a:schemeClr>
+            </a:gs>
+            <a:gs pos="100000">
+              <a:schemeClr val="phClr">
+                <a:shade val="63000"/>
+                <a:satMod val="120000"/>
+              </a:schemeClr>
+            </a:gs>
+          </a:gsLst>
+          <a:lin ang="5400000" scaled="0"/>
+        </a:gradFill>
+      </a:bgFillStyleLst>
+    </a:fmtScheme>
+  </a:themeElements>
+  <a:objectDefaults/>
+  <a:extraClrSchemeLst/>
+  <a:extLst>
+    <a:ext uri="{05A4C25C-085E-4340-85A3-A5531E510DB2}">
+      <thm15:themeFamily xmlns:thm15="http://schemas.microsoft.com/office/thememl/2012/main" name="Office Theme" id="{62F939B6-93AF-4DB8-9C6B-D6C7DFDC589F}" vid="{4A3C46E8-61CC-4603-A589-7422A47A8E4A}"/>
+    </a:ext>
+  </a:extLst>
+</a:theme>
 </file>